--- a/Pregrado/Investigacion en ciencia y tecnologia/Clases/Sesion 04 - Identificación de problemas y pregunta de investigación/Presentacion.pptx
+++ b/Pregrado/Investigacion en ciencia y tecnologia/Clases/Sesion 04 - Identificación de problemas y pregunta de investigación/Presentacion.pptx
@@ -3367,41 +3367,6 @@
           </a:p>
         </p:txBody>
       </p:sp>
-      <p:sp>
-        <p:nvSpPr>
-          <p:cNvPr id="7" name="TextBox 6"/>
-          <p:cNvSpPr txBox="1"/>
-          <p:nvPr/>
-        </p:nvSpPr>
-        <p:spPr>
-          <a:xfrm>
-            <a:off x="2194560" y="6446520"/>
-            <a:ext cx="5943600" cy="274320"/>
-          </a:xfrm>
-          <a:prstGeom prst="rect">
-            <a:avLst/>
-          </a:prstGeom>
-          <a:noFill/>
-        </p:spPr>
-        <p:txBody>
-          <a:bodyPr wrap="square" anchor="t" lIns="0" rIns="0" tIns="0" bIns="0">
-            <a:spAutoFit/>
-          </a:bodyPr>
-          <a:lstStyle/>
-          <a:p>
-            <a:pPr algn="l"/>
-            <a:r>
-              <a:rPr sz="1000" b="1" i="0">
-                <a:solidFill>
-                  <a:srgbClr val="8F989D"/>
-                </a:solidFill>
-                <a:latin typeface="Calibri"/>
-              </a:rPr>
-              <a:t>Inicio 5:10 pm</a:t>
-            </a:r>
-          </a:p>
-        </p:txBody>
-      </p:sp>
     </p:spTree>
   </p:cSld>
   <p:clrMapOvr>
@@ -3821,41 +3786,6 @@
       <p:sp>
         <p:nvSpPr>
           <p:cNvPr id="5" name="TextBox 4"/>
-          <p:cNvSpPr txBox="1"/>
-          <p:nvPr/>
-        </p:nvSpPr>
-        <p:spPr>
-          <a:xfrm>
-            <a:off x="2194560" y="6446520"/>
-            <a:ext cx="5943600" cy="274320"/>
-          </a:xfrm>
-          <a:prstGeom prst="rect">
-            <a:avLst/>
-          </a:prstGeom>
-          <a:noFill/>
-        </p:spPr>
-        <p:txBody>
-          <a:bodyPr wrap="square" anchor="t" lIns="0" rIns="0" tIns="0" bIns="0">
-            <a:spAutoFit/>
-          </a:bodyPr>
-          <a:lstStyle/>
-          <a:p>
-            <a:pPr algn="l"/>
-            <a:r>
-              <a:rPr sz="1000" b="1" i="0">
-                <a:solidFill>
-                  <a:srgbClr val="8F989D"/>
-                </a:solidFill>
-                <a:latin typeface="Calibri"/>
-              </a:rPr>
-              <a:t>Inicio 5:10 pm</a:t>
-            </a:r>
-          </a:p>
-        </p:txBody>
-      </p:sp>
-      <p:sp>
-        <p:nvSpPr>
-          <p:cNvPr id="6" name="TextBox 5"/>
           <p:cNvSpPr txBox="1"/>
           <p:nvPr/>
         </p:nvSpPr>
@@ -4551,41 +4481,6 @@
         </p:nvSpPr>
         <p:spPr>
           <a:xfrm>
-            <a:off x="2194560" y="6446520"/>
-            <a:ext cx="5943600" cy="274320"/>
-          </a:xfrm>
-          <a:prstGeom prst="rect">
-            <a:avLst/>
-          </a:prstGeom>
-          <a:noFill/>
-        </p:spPr>
-        <p:txBody>
-          <a:bodyPr wrap="square" anchor="t" lIns="0" rIns="0" tIns="0" bIns="0">
-            <a:spAutoFit/>
-          </a:bodyPr>
-          <a:lstStyle/>
-          <a:p>
-            <a:pPr algn="l"/>
-            <a:r>
-              <a:rPr sz="1000" b="1" i="0">
-                <a:solidFill>
-                  <a:srgbClr val="8F989D"/>
-                </a:solidFill>
-                <a:latin typeface="Calibri"/>
-              </a:rPr>
-              <a:t>Inicio 5:10 pm</a:t>
-            </a:r>
-          </a:p>
-        </p:txBody>
-      </p:sp>
-      <p:sp>
-        <p:nvSpPr>
-          <p:cNvPr id="7" name="TextBox 6"/>
-          <p:cNvSpPr txBox="1"/>
-          <p:nvPr/>
-        </p:nvSpPr>
-        <p:spPr>
-          <a:xfrm>
             <a:off x="11094415" y="6446520"/>
             <a:ext cx="548640" cy="274320"/>
           </a:xfrm>
@@ -5160,41 +5055,6 @@
         </p:nvSpPr>
         <p:spPr>
           <a:xfrm>
-            <a:off x="2194560" y="6446520"/>
-            <a:ext cx="5943600" cy="274320"/>
-          </a:xfrm>
-          <a:prstGeom prst="rect">
-            <a:avLst/>
-          </a:prstGeom>
-          <a:noFill/>
-        </p:spPr>
-        <p:txBody>
-          <a:bodyPr wrap="square" anchor="t" lIns="0" rIns="0" tIns="0" bIns="0">
-            <a:spAutoFit/>
-          </a:bodyPr>
-          <a:lstStyle/>
-          <a:p>
-            <a:pPr algn="l"/>
-            <a:r>
-              <a:rPr sz="1000" b="1" i="0">
-                <a:solidFill>
-                  <a:srgbClr val="8F989D"/>
-                </a:solidFill>
-                <a:latin typeface="Calibri"/>
-              </a:rPr>
-              <a:t>Inicio 5:10 pm</a:t>
-            </a:r>
-          </a:p>
-        </p:txBody>
-      </p:sp>
-      <p:sp>
-        <p:nvSpPr>
-          <p:cNvPr id="7" name="TextBox 6"/>
-          <p:cNvSpPr txBox="1"/>
-          <p:nvPr/>
-        </p:nvSpPr>
-        <p:spPr>
-          <a:xfrm>
             <a:off x="11094415" y="6446520"/>
             <a:ext cx="548640" cy="274320"/>
           </a:xfrm>
@@ -5680,41 +5540,6 @@
         </p:nvSpPr>
         <p:spPr>
           <a:xfrm>
-            <a:off x="2194560" y="6446520"/>
-            <a:ext cx="5943600" cy="274320"/>
-          </a:xfrm>
-          <a:prstGeom prst="rect">
-            <a:avLst/>
-          </a:prstGeom>
-          <a:noFill/>
-        </p:spPr>
-        <p:txBody>
-          <a:bodyPr wrap="square" anchor="t" lIns="0" rIns="0" tIns="0" bIns="0">
-            <a:spAutoFit/>
-          </a:bodyPr>
-          <a:lstStyle/>
-          <a:p>
-            <a:pPr algn="l"/>
-            <a:r>
-              <a:rPr sz="1000" b="1" i="0">
-                <a:solidFill>
-                  <a:srgbClr val="8F989D"/>
-                </a:solidFill>
-                <a:latin typeface="Calibri"/>
-              </a:rPr>
-              <a:t>Inicio 5:10 pm</a:t>
-            </a:r>
-          </a:p>
-        </p:txBody>
-      </p:sp>
-      <p:sp>
-        <p:nvSpPr>
-          <p:cNvPr id="11" name="TextBox 10"/>
-          <p:cNvSpPr txBox="1"/>
-          <p:nvPr/>
-        </p:nvSpPr>
-        <p:spPr>
-          <a:xfrm>
             <a:off x="11094415" y="6446520"/>
             <a:ext cx="548640" cy="274320"/>
           </a:xfrm>
@@ -5958,41 +5783,6 @@
         </p:nvSpPr>
         <p:spPr>
           <a:xfrm>
-            <a:off x="2194560" y="6446520"/>
-            <a:ext cx="5943600" cy="274320"/>
-          </a:xfrm>
-          <a:prstGeom prst="rect">
-            <a:avLst/>
-          </a:prstGeom>
-          <a:noFill/>
-        </p:spPr>
-        <p:txBody>
-          <a:bodyPr wrap="square" anchor="t" lIns="0" rIns="0" tIns="0" bIns="0">
-            <a:spAutoFit/>
-          </a:bodyPr>
-          <a:lstStyle/>
-          <a:p>
-            <a:pPr algn="l"/>
-            <a:r>
-              <a:rPr sz="1000" b="1" i="0">
-                <a:solidFill>
-                  <a:srgbClr val="8F989D"/>
-                </a:solidFill>
-                <a:latin typeface="Calibri"/>
-              </a:rPr>
-              <a:t>Inicio 5:10 pm</a:t>
-            </a:r>
-          </a:p>
-        </p:txBody>
-      </p:sp>
-      <p:sp>
-        <p:nvSpPr>
-          <p:cNvPr id="7" name="TextBox 6"/>
-          <p:cNvSpPr txBox="1"/>
-          <p:nvPr/>
-        </p:nvSpPr>
-        <p:spPr>
-          <a:xfrm>
             <a:off x="11094415" y="6446520"/>
             <a:ext cx="548640" cy="274320"/>
           </a:xfrm>
@@ -6588,41 +6378,6 @@
         </p:nvSpPr>
         <p:spPr>
           <a:xfrm>
-            <a:off x="2194560" y="6446520"/>
-            <a:ext cx="5943600" cy="274320"/>
-          </a:xfrm>
-          <a:prstGeom prst="rect">
-            <a:avLst/>
-          </a:prstGeom>
-          <a:noFill/>
-        </p:spPr>
-        <p:txBody>
-          <a:bodyPr wrap="square" anchor="t" lIns="0" rIns="0" tIns="0" bIns="0">
-            <a:spAutoFit/>
-          </a:bodyPr>
-          <a:lstStyle/>
-          <a:p>
-            <a:pPr algn="l"/>
-            <a:r>
-              <a:rPr sz="1000" b="1" i="0">
-                <a:solidFill>
-                  <a:srgbClr val="8F989D"/>
-                </a:solidFill>
-                <a:latin typeface="Calibri"/>
-              </a:rPr>
-              <a:t>Inicio 5:10 pm</a:t>
-            </a:r>
-          </a:p>
-        </p:txBody>
-      </p:sp>
-      <p:sp>
-        <p:nvSpPr>
-          <p:cNvPr id="6" name="TextBox 5"/>
-          <p:cNvSpPr txBox="1"/>
-          <p:nvPr/>
-        </p:nvSpPr>
-        <p:spPr>
-          <a:xfrm>
             <a:off x="11094415" y="6446520"/>
             <a:ext cx="548640" cy="274320"/>
           </a:xfrm>
@@ -6652,7 +6407,7 @@
       </p:sp>
       <p:sp>
         <p:nvSpPr>
-          <p:cNvPr id="7" name="TextBox 6"/>
+          <p:cNvPr id="6" name="TextBox 5"/>
           <p:cNvSpPr txBox="1"/>
           <p:nvPr/>
         </p:nvSpPr>
@@ -7218,41 +6973,6 @@
         </p:nvSpPr>
         <p:spPr>
           <a:xfrm>
-            <a:off x="2194560" y="6446520"/>
-            <a:ext cx="5943600" cy="274320"/>
-          </a:xfrm>
-          <a:prstGeom prst="rect">
-            <a:avLst/>
-          </a:prstGeom>
-          <a:noFill/>
-        </p:spPr>
-        <p:txBody>
-          <a:bodyPr wrap="square" anchor="t" lIns="0" rIns="0" tIns="0" bIns="0">
-            <a:spAutoFit/>
-          </a:bodyPr>
-          <a:lstStyle/>
-          <a:p>
-            <a:pPr algn="l"/>
-            <a:r>
-              <a:rPr sz="1000" b="1" i="0">
-                <a:solidFill>
-                  <a:srgbClr val="8F989D"/>
-                </a:solidFill>
-                <a:latin typeface="Calibri"/>
-              </a:rPr>
-              <a:t>Inicio 5:10 pm</a:t>
-            </a:r>
-          </a:p>
-        </p:txBody>
-      </p:sp>
-      <p:sp>
-        <p:nvSpPr>
-          <p:cNvPr id="6" name="TextBox 5"/>
-          <p:cNvSpPr txBox="1"/>
-          <p:nvPr/>
-        </p:nvSpPr>
-        <p:spPr>
-          <a:xfrm>
             <a:off x="11094415" y="6446520"/>
             <a:ext cx="548640" cy="274320"/>
           </a:xfrm>
@@ -7704,41 +7424,6 @@
         </p:nvSpPr>
         <p:spPr>
           <a:xfrm>
-            <a:off x="2194560" y="6446520"/>
-            <a:ext cx="5943600" cy="274320"/>
-          </a:xfrm>
-          <a:prstGeom prst="rect">
-            <a:avLst/>
-          </a:prstGeom>
-          <a:noFill/>
-        </p:spPr>
-        <p:txBody>
-          <a:bodyPr wrap="square" anchor="t" lIns="0" rIns="0" tIns="0" bIns="0">
-            <a:spAutoFit/>
-          </a:bodyPr>
-          <a:lstStyle/>
-          <a:p>
-            <a:pPr algn="l"/>
-            <a:r>
-              <a:rPr sz="1000" b="1" i="0">
-                <a:solidFill>
-                  <a:srgbClr val="8F989D"/>
-                </a:solidFill>
-                <a:latin typeface="Calibri"/>
-              </a:rPr>
-              <a:t>Inicio 5:10 pm</a:t>
-            </a:r>
-          </a:p>
-        </p:txBody>
-      </p:sp>
-      <p:sp>
-        <p:nvSpPr>
-          <p:cNvPr id="6" name="TextBox 5"/>
-          <p:cNvSpPr txBox="1"/>
-          <p:nvPr/>
-        </p:nvSpPr>
-        <p:spPr>
-          <a:xfrm>
             <a:off x="11094415" y="6446520"/>
             <a:ext cx="548640" cy="274320"/>
           </a:xfrm>
@@ -7970,41 +7655,6 @@
         </p:nvSpPr>
         <p:spPr>
           <a:xfrm>
-            <a:off x="2194560" y="6446520"/>
-            <a:ext cx="5943600" cy="274320"/>
-          </a:xfrm>
-          <a:prstGeom prst="rect">
-            <a:avLst/>
-          </a:prstGeom>
-          <a:noFill/>
-        </p:spPr>
-        <p:txBody>
-          <a:bodyPr wrap="square" anchor="t" lIns="0" rIns="0" tIns="0" bIns="0">
-            <a:spAutoFit/>
-          </a:bodyPr>
-          <a:lstStyle/>
-          <a:p>
-            <a:pPr algn="l"/>
-            <a:r>
-              <a:rPr sz="1000" b="1" i="0">
-                <a:solidFill>
-                  <a:srgbClr val="8F989D"/>
-                </a:solidFill>
-                <a:latin typeface="Calibri"/>
-              </a:rPr>
-              <a:t>Inicio 5:10 pm</a:t>
-            </a:r>
-          </a:p>
-        </p:txBody>
-      </p:sp>
-      <p:sp>
-        <p:nvSpPr>
-          <p:cNvPr id="6" name="TextBox 5"/>
-          <p:cNvSpPr txBox="1"/>
-          <p:nvPr/>
-        </p:nvSpPr>
-        <p:spPr>
-          <a:xfrm>
             <a:off x="11094415" y="6446520"/>
             <a:ext cx="548640" cy="274320"/>
           </a:xfrm>
@@ -8404,41 +8054,6 @@
         </p:nvSpPr>
         <p:spPr>
           <a:xfrm>
-            <a:off x="2194560" y="6446520"/>
-            <a:ext cx="5943600" cy="274320"/>
-          </a:xfrm>
-          <a:prstGeom prst="rect">
-            <a:avLst/>
-          </a:prstGeom>
-          <a:noFill/>
-        </p:spPr>
-        <p:txBody>
-          <a:bodyPr wrap="square" anchor="t" lIns="0" rIns="0" tIns="0" bIns="0">
-            <a:spAutoFit/>
-          </a:bodyPr>
-          <a:lstStyle/>
-          <a:p>
-            <a:pPr algn="l"/>
-            <a:r>
-              <a:rPr sz="1000" b="1" i="0">
-                <a:solidFill>
-                  <a:srgbClr val="8F989D"/>
-                </a:solidFill>
-                <a:latin typeface="Calibri"/>
-              </a:rPr>
-              <a:t>Inicio 5:10 pm</a:t>
-            </a:r>
-          </a:p>
-        </p:txBody>
-      </p:sp>
-      <p:sp>
-        <p:nvSpPr>
-          <p:cNvPr id="6" name="TextBox 5"/>
-          <p:cNvSpPr txBox="1"/>
-          <p:nvPr/>
-        </p:nvSpPr>
-        <p:spPr>
-          <a:xfrm>
             <a:off x="11094415" y="6446520"/>
             <a:ext cx="548640" cy="274320"/>
           </a:xfrm>
@@ -8836,41 +8451,6 @@
         </p:nvSpPr>
         <p:spPr>
           <a:xfrm>
-            <a:off x="2194560" y="6446520"/>
-            <a:ext cx="5943600" cy="274320"/>
-          </a:xfrm>
-          <a:prstGeom prst="rect">
-            <a:avLst/>
-          </a:prstGeom>
-          <a:noFill/>
-        </p:spPr>
-        <p:txBody>
-          <a:bodyPr wrap="square" anchor="t" lIns="0" rIns="0" tIns="0" bIns="0">
-            <a:spAutoFit/>
-          </a:bodyPr>
-          <a:lstStyle/>
-          <a:p>
-            <a:pPr algn="l"/>
-            <a:r>
-              <a:rPr sz="1000" b="1" i="0">
-                <a:solidFill>
-                  <a:srgbClr val="8F989D"/>
-                </a:solidFill>
-                <a:latin typeface="Calibri"/>
-              </a:rPr>
-              <a:t>Inicio 5:10 pm</a:t>
-            </a:r>
-          </a:p>
-        </p:txBody>
-      </p:sp>
-      <p:sp>
-        <p:nvSpPr>
-          <p:cNvPr id="6" name="TextBox 5"/>
-          <p:cNvSpPr txBox="1"/>
-          <p:nvPr/>
-        </p:nvSpPr>
-        <p:spPr>
-          <a:xfrm>
             <a:off x="11094415" y="6446520"/>
             <a:ext cx="548640" cy="274320"/>
           </a:xfrm>
@@ -8900,7 +8480,7 @@
       </p:sp>
       <p:sp>
         <p:nvSpPr>
-          <p:cNvPr id="7" name="TextBox 6"/>
+          <p:cNvPr id="6" name="TextBox 5"/>
           <p:cNvSpPr txBox="1"/>
           <p:nvPr/>
         </p:nvSpPr>
@@ -9169,41 +8749,6 @@
           </a:p>
         </p:txBody>
       </p:sp>
-      <p:sp>
-        <p:nvSpPr>
-          <p:cNvPr id="7" name="TextBox 6"/>
-          <p:cNvSpPr txBox="1"/>
-          <p:nvPr/>
-        </p:nvSpPr>
-        <p:spPr>
-          <a:xfrm>
-            <a:off x="2194560" y="6446520"/>
-            <a:ext cx="5943600" cy="274320"/>
-          </a:xfrm>
-          <a:prstGeom prst="rect">
-            <a:avLst/>
-          </a:prstGeom>
-          <a:noFill/>
-        </p:spPr>
-        <p:txBody>
-          <a:bodyPr wrap="square" anchor="t" lIns="0" rIns="0" tIns="0" bIns="0">
-            <a:spAutoFit/>
-          </a:bodyPr>
-          <a:lstStyle/>
-          <a:p>
-            <a:pPr algn="l"/>
-            <a:r>
-              <a:rPr sz="1000" b="1" i="0">
-                <a:solidFill>
-                  <a:srgbClr val="8F989D"/>
-                </a:solidFill>
-                <a:latin typeface="Calibri"/>
-              </a:rPr>
-              <a:t>Inicio 5:10 pm</a:t>
-            </a:r>
-          </a:p>
-        </p:txBody>
-      </p:sp>
     </p:spTree>
   </p:cSld>
   <p:clrMapOvr>
@@ -9695,41 +9240,6 @@
       <p:sp>
         <p:nvSpPr>
           <p:cNvPr id="5" name="TextBox 4"/>
-          <p:cNvSpPr txBox="1"/>
-          <p:nvPr/>
-        </p:nvSpPr>
-        <p:spPr>
-          <a:xfrm>
-            <a:off x="2194560" y="6446520"/>
-            <a:ext cx="5943600" cy="274320"/>
-          </a:xfrm>
-          <a:prstGeom prst="rect">
-            <a:avLst/>
-          </a:prstGeom>
-          <a:noFill/>
-        </p:spPr>
-        <p:txBody>
-          <a:bodyPr wrap="square" anchor="t" lIns="0" rIns="0" tIns="0" bIns="0">
-            <a:spAutoFit/>
-          </a:bodyPr>
-          <a:lstStyle/>
-          <a:p>
-            <a:pPr algn="l"/>
-            <a:r>
-              <a:rPr sz="1000" b="1" i="0">
-                <a:solidFill>
-                  <a:srgbClr val="8F989D"/>
-                </a:solidFill>
-                <a:latin typeface="Calibri"/>
-              </a:rPr>
-              <a:t>Inicio 5:10 pm</a:t>
-            </a:r>
-          </a:p>
-        </p:txBody>
-      </p:sp>
-      <p:sp>
-        <p:nvSpPr>
-          <p:cNvPr id="6" name="TextBox 5"/>
           <p:cNvSpPr txBox="1"/>
           <p:nvPr/>
         </p:nvSpPr>
@@ -10254,41 +9764,6 @@
       <p:sp>
         <p:nvSpPr>
           <p:cNvPr id="6" name="TextBox 5"/>
-          <p:cNvSpPr txBox="1"/>
-          <p:nvPr/>
-        </p:nvSpPr>
-        <p:spPr>
-          <a:xfrm>
-            <a:off x="2194560" y="6446520"/>
-            <a:ext cx="5943600" cy="274320"/>
-          </a:xfrm>
-          <a:prstGeom prst="rect">
-            <a:avLst/>
-          </a:prstGeom>
-          <a:noFill/>
-        </p:spPr>
-        <p:txBody>
-          <a:bodyPr wrap="square" anchor="t" lIns="0" rIns="0" tIns="0" bIns="0">
-            <a:spAutoFit/>
-          </a:bodyPr>
-          <a:lstStyle/>
-          <a:p>
-            <a:pPr algn="l"/>
-            <a:r>
-              <a:rPr sz="1000" b="1" i="0">
-                <a:solidFill>
-                  <a:srgbClr val="8F989D"/>
-                </a:solidFill>
-                <a:latin typeface="Calibri"/>
-              </a:rPr>
-              <a:t>Inicio 5:10 pm</a:t>
-            </a:r>
-          </a:p>
-        </p:txBody>
-      </p:sp>
-      <p:sp>
-        <p:nvSpPr>
-          <p:cNvPr id="7" name="TextBox 6"/>
           <p:cNvSpPr txBox="1"/>
           <p:nvPr/>
         </p:nvSpPr>
@@ -10899,41 +10374,6 @@
         </p:nvSpPr>
         <p:spPr>
           <a:xfrm>
-            <a:off x="2194560" y="6446520"/>
-            <a:ext cx="5943600" cy="274320"/>
-          </a:xfrm>
-          <a:prstGeom prst="rect">
-            <a:avLst/>
-          </a:prstGeom>
-          <a:noFill/>
-        </p:spPr>
-        <p:txBody>
-          <a:bodyPr wrap="square" anchor="t" lIns="0" rIns="0" tIns="0" bIns="0">
-            <a:spAutoFit/>
-          </a:bodyPr>
-          <a:lstStyle/>
-          <a:p>
-            <a:pPr algn="l"/>
-            <a:r>
-              <a:rPr sz="1000" b="1" i="0">
-                <a:solidFill>
-                  <a:srgbClr val="8F989D"/>
-                </a:solidFill>
-                <a:latin typeface="Calibri"/>
-              </a:rPr>
-              <a:t>Inicio 5:10 pm</a:t>
-            </a:r>
-          </a:p>
-        </p:txBody>
-      </p:sp>
-      <p:sp>
-        <p:nvSpPr>
-          <p:cNvPr id="7" name="TextBox 6"/>
-          <p:cNvSpPr txBox="1"/>
-          <p:nvPr/>
-        </p:nvSpPr>
-        <p:spPr>
-          <a:xfrm>
             <a:off x="11094415" y="6446520"/>
             <a:ext cx="548640" cy="274320"/>
           </a:xfrm>
@@ -11421,41 +10861,6 @@
         </p:nvSpPr>
         <p:spPr>
           <a:xfrm>
-            <a:off x="2194560" y="6446520"/>
-            <a:ext cx="5943600" cy="274320"/>
-          </a:xfrm>
-          <a:prstGeom prst="rect">
-            <a:avLst/>
-          </a:prstGeom>
-          <a:noFill/>
-        </p:spPr>
-        <p:txBody>
-          <a:bodyPr wrap="square" anchor="t" lIns="0" rIns="0" tIns="0" bIns="0">
-            <a:spAutoFit/>
-          </a:bodyPr>
-          <a:lstStyle/>
-          <a:p>
-            <a:pPr algn="l"/>
-            <a:r>
-              <a:rPr sz="1000" b="1" i="0">
-                <a:solidFill>
-                  <a:srgbClr val="8F989D"/>
-                </a:solidFill>
-                <a:latin typeface="Calibri"/>
-              </a:rPr>
-              <a:t>Inicio 5:10 pm</a:t>
-            </a:r>
-          </a:p>
-        </p:txBody>
-      </p:sp>
-      <p:sp>
-        <p:nvSpPr>
-          <p:cNvPr id="6" name="TextBox 5"/>
-          <p:cNvSpPr txBox="1"/>
-          <p:nvPr/>
-        </p:nvSpPr>
-        <p:spPr>
-          <a:xfrm>
             <a:off x="11094415" y="6446520"/>
             <a:ext cx="548640" cy="274320"/>
           </a:xfrm>
@@ -11961,41 +11366,6 @@
         </p:nvSpPr>
         <p:spPr>
           <a:xfrm>
-            <a:off x="2194560" y="6446520"/>
-            <a:ext cx="5943600" cy="274320"/>
-          </a:xfrm>
-          <a:prstGeom prst="rect">
-            <a:avLst/>
-          </a:prstGeom>
-          <a:noFill/>
-        </p:spPr>
-        <p:txBody>
-          <a:bodyPr wrap="square" anchor="t" lIns="0" rIns="0" tIns="0" bIns="0">
-            <a:spAutoFit/>
-          </a:bodyPr>
-          <a:lstStyle/>
-          <a:p>
-            <a:pPr algn="l"/>
-            <a:r>
-              <a:rPr sz="1000" b="1" i="0">
-                <a:solidFill>
-                  <a:srgbClr val="8F989D"/>
-                </a:solidFill>
-                <a:latin typeface="Calibri"/>
-              </a:rPr>
-              <a:t>Inicio 5:10 pm</a:t>
-            </a:r>
-          </a:p>
-        </p:txBody>
-      </p:sp>
-      <p:sp>
-        <p:nvSpPr>
-          <p:cNvPr id="6" name="TextBox 5"/>
-          <p:cNvSpPr txBox="1"/>
-          <p:nvPr/>
-        </p:nvSpPr>
-        <p:spPr>
-          <a:xfrm>
             <a:off x="11094415" y="6446520"/>
             <a:ext cx="548640" cy="274320"/>
           </a:xfrm>
@@ -12175,41 +11545,6 @@
         </p:nvSpPr>
         <p:spPr>
           <a:xfrm>
-            <a:off x="2194560" y="6446520"/>
-            <a:ext cx="5943600" cy="274320"/>
-          </a:xfrm>
-          <a:prstGeom prst="rect">
-            <a:avLst/>
-          </a:prstGeom>
-          <a:noFill/>
-        </p:spPr>
-        <p:txBody>
-          <a:bodyPr wrap="square" anchor="t" lIns="0" rIns="0" tIns="0" bIns="0">
-            <a:spAutoFit/>
-          </a:bodyPr>
-          <a:lstStyle/>
-          <a:p>
-            <a:pPr algn="l"/>
-            <a:r>
-              <a:rPr sz="1000" b="1" i="0">
-                <a:solidFill>
-                  <a:srgbClr val="8F989D"/>
-                </a:solidFill>
-                <a:latin typeface="Calibri"/>
-              </a:rPr>
-              <a:t>Inicio 5:10 pm</a:t>
-            </a:r>
-          </a:p>
-        </p:txBody>
-      </p:sp>
-      <p:sp>
-        <p:nvSpPr>
-          <p:cNvPr id="6" name="TextBox 5"/>
-          <p:cNvSpPr txBox="1"/>
-          <p:nvPr/>
-        </p:nvSpPr>
-        <p:spPr>
-          <a:xfrm>
             <a:off x="11094415" y="6446520"/>
             <a:ext cx="548640" cy="274320"/>
           </a:xfrm>
@@ -12656,41 +11991,6 @@
       <p:sp>
         <p:nvSpPr>
           <p:cNvPr id="5" name="TextBox 4"/>
-          <p:cNvSpPr txBox="1"/>
-          <p:nvPr/>
-        </p:nvSpPr>
-        <p:spPr>
-          <a:xfrm>
-            <a:off x="2194560" y="6446520"/>
-            <a:ext cx="5943600" cy="274320"/>
-          </a:xfrm>
-          <a:prstGeom prst="rect">
-            <a:avLst/>
-          </a:prstGeom>
-          <a:noFill/>
-        </p:spPr>
-        <p:txBody>
-          <a:bodyPr wrap="square" anchor="t" lIns="0" rIns="0" tIns="0" bIns="0">
-            <a:spAutoFit/>
-          </a:bodyPr>
-          <a:lstStyle/>
-          <a:p>
-            <a:pPr algn="l"/>
-            <a:r>
-              <a:rPr sz="1000" b="1" i="0">
-                <a:solidFill>
-                  <a:srgbClr val="8F989D"/>
-                </a:solidFill>
-                <a:latin typeface="Calibri"/>
-              </a:rPr>
-              <a:t>Inicio 5:10 pm</a:t>
-            </a:r>
-          </a:p>
-        </p:txBody>
-      </p:sp>
-      <p:sp>
-        <p:nvSpPr>
-          <p:cNvPr id="6" name="TextBox 5"/>
           <p:cNvSpPr txBox="1"/>
           <p:nvPr/>
         </p:nvSpPr>
